--- a/XAI Forest Fire Risk Presentation.pptx
+++ b/XAI Forest Fire Risk Presentation.pptx
@@ -836,7 +836,7 @@
   <p:cSld>
     <p:spTree>
       <p:nvGrpSpPr>
-        <p:cNvPr id="226" name="Shape 226"/>
+        <p:cNvPr id="227" name="Shape 227"/>
         <p:cNvGrpSpPr/>
         <p:nvPr/>
       </p:nvGrpSpPr>
@@ -850,7 +850,7 @@
       </p:grpSpPr>
       <p:sp>
         <p:nvSpPr>
-          <p:cNvPr id="227" name="Google Shape;227;p7:notes"/>
+          <p:cNvPr id="228" name="Google Shape;228;p7:notes"/>
           <p:cNvSpPr txBox="1"/>
           <p:nvPr>
             <p:ph idx="1" type="body"/>
@@ -889,7 +889,7 @@
       </p:sp>
       <p:sp>
         <p:nvSpPr>
-          <p:cNvPr id="228" name="Google Shape;228;p7:notes"/>
+          <p:cNvPr id="229" name="Google Shape;229;p7:notes"/>
           <p:cNvSpPr/>
           <p:nvPr>
             <p:ph idx="2" type="sldImg"/>
@@ -935,7 +935,7 @@
   <p:cSld>
     <p:spTree>
       <p:nvGrpSpPr>
-        <p:cNvPr id="249" name="Shape 249"/>
+        <p:cNvPr id="250" name="Shape 250"/>
         <p:cNvGrpSpPr/>
         <p:nvPr/>
       </p:nvGrpSpPr>
@@ -949,7 +949,7 @@
       </p:grpSpPr>
       <p:sp>
         <p:nvSpPr>
-          <p:cNvPr id="250" name="Google Shape;250;g3ed1bab94b1_0_55:notes"/>
+          <p:cNvPr id="251" name="Google Shape;251;g3ed1bab94b1_0_55:notes"/>
           <p:cNvSpPr/>
           <p:nvPr>
             <p:ph idx="2" type="sldImg"/>
@@ -984,7 +984,7 @@
       </p:sp>
       <p:sp>
         <p:nvSpPr>
-          <p:cNvPr id="251" name="Google Shape;251;g3ed1bab94b1_0_55:notes"/>
+          <p:cNvPr id="252" name="Google Shape;252;g3ed1bab94b1_0_55:notes"/>
           <p:cNvSpPr txBox="1"/>
           <p:nvPr>
             <p:ph idx="1" type="body"/>
@@ -1034,7 +1034,7 @@
   <p:cSld>
     <p:spTree>
       <p:nvGrpSpPr>
-        <p:cNvPr id="280" name="Shape 280"/>
+        <p:cNvPr id="281" name="Shape 281"/>
         <p:cNvGrpSpPr/>
         <p:nvPr/>
       </p:nvGrpSpPr>
@@ -1048,7 +1048,7 @@
       </p:grpSpPr>
       <p:sp>
         <p:nvSpPr>
-          <p:cNvPr id="281" name="Google Shape;281;p8:notes"/>
+          <p:cNvPr id="282" name="Google Shape;282;p8:notes"/>
           <p:cNvSpPr txBox="1"/>
           <p:nvPr>
             <p:ph idx="1" type="body"/>
@@ -1087,7 +1087,7 @@
       </p:sp>
       <p:sp>
         <p:nvSpPr>
-          <p:cNvPr id="282" name="Google Shape;282;p8:notes"/>
+          <p:cNvPr id="283" name="Google Shape;283;p8:notes"/>
           <p:cNvSpPr/>
           <p:nvPr>
             <p:ph idx="2" type="sldImg"/>
@@ -1430,7 +1430,7 @@
   <p:cSld>
     <p:spTree>
       <p:nvGrpSpPr>
-        <p:cNvPr id="159" name="Shape 159"/>
+        <p:cNvPr id="160" name="Shape 160"/>
         <p:cNvGrpSpPr/>
         <p:nvPr/>
       </p:nvGrpSpPr>
@@ -1444,7 +1444,7 @@
       </p:grpSpPr>
       <p:sp>
         <p:nvSpPr>
-          <p:cNvPr id="160" name="Google Shape;160;p3:notes"/>
+          <p:cNvPr id="161" name="Google Shape;161;p3:notes"/>
           <p:cNvSpPr txBox="1"/>
           <p:nvPr>
             <p:ph idx="1" type="body"/>
@@ -1483,7 +1483,7 @@
       </p:sp>
       <p:sp>
         <p:nvSpPr>
-          <p:cNvPr id="161" name="Google Shape;161;p3:notes"/>
+          <p:cNvPr id="162" name="Google Shape;162;p3:notes"/>
           <p:cNvSpPr/>
           <p:nvPr>
             <p:ph idx="2" type="sldImg"/>
@@ -1529,7 +1529,7 @@
   <p:cSld>
     <p:spTree>
       <p:nvGrpSpPr>
-        <p:cNvPr id="169" name="Shape 169"/>
+        <p:cNvPr id="170" name="Shape 170"/>
         <p:cNvGrpSpPr/>
         <p:nvPr/>
       </p:nvGrpSpPr>
@@ -1543,7 +1543,7 @@
       </p:grpSpPr>
       <p:sp>
         <p:nvSpPr>
-          <p:cNvPr id="170" name="Google Shape;170;g3e283492eef_0_6:notes"/>
+          <p:cNvPr id="171" name="Google Shape;171;g3e283492eef_0_6:notes"/>
           <p:cNvSpPr txBox="1"/>
           <p:nvPr>
             <p:ph idx="1" type="body"/>
@@ -1582,7 +1582,7 @@
       </p:sp>
       <p:sp>
         <p:nvSpPr>
-          <p:cNvPr id="171" name="Google Shape;171;g3e283492eef_0_6:notes"/>
+          <p:cNvPr id="172" name="Google Shape;172;g3e283492eef_0_6:notes"/>
           <p:cNvSpPr/>
           <p:nvPr>
             <p:ph idx="2" type="sldImg"/>
@@ -1628,7 +1628,7 @@
   <p:cSld>
     <p:spTree>
       <p:nvGrpSpPr>
-        <p:cNvPr id="181" name="Shape 181"/>
+        <p:cNvPr id="182" name="Shape 182"/>
         <p:cNvGrpSpPr/>
         <p:nvPr/>
       </p:nvGrpSpPr>
@@ -1642,7 +1642,7 @@
       </p:grpSpPr>
       <p:sp>
         <p:nvSpPr>
-          <p:cNvPr id="182" name="Google Shape;182;p4:notes"/>
+          <p:cNvPr id="183" name="Google Shape;183;p4:notes"/>
           <p:cNvSpPr txBox="1"/>
           <p:nvPr>
             <p:ph idx="1" type="body"/>
@@ -1681,7 +1681,7 @@
       </p:sp>
       <p:sp>
         <p:nvSpPr>
-          <p:cNvPr id="183" name="Google Shape;183;p4:notes"/>
+          <p:cNvPr id="184" name="Google Shape;184;p4:notes"/>
           <p:cNvSpPr/>
           <p:nvPr>
             <p:ph idx="2" type="sldImg"/>
@@ -1727,7 +1727,7 @@
   <p:cSld>
     <p:spTree>
       <p:nvGrpSpPr>
-        <p:cNvPr id="192" name="Shape 192"/>
+        <p:cNvPr id="193" name="Shape 193"/>
         <p:cNvGrpSpPr/>
         <p:nvPr/>
       </p:nvGrpSpPr>
@@ -1741,7 +1741,7 @@
       </p:grpSpPr>
       <p:sp>
         <p:nvSpPr>
-          <p:cNvPr id="193" name="Google Shape;193;p5:notes"/>
+          <p:cNvPr id="194" name="Google Shape;194;p5:notes"/>
           <p:cNvSpPr txBox="1"/>
           <p:nvPr>
             <p:ph idx="1" type="body"/>
@@ -1780,7 +1780,7 @@
       </p:sp>
       <p:sp>
         <p:nvSpPr>
-          <p:cNvPr id="194" name="Google Shape;194;p5:notes"/>
+          <p:cNvPr id="195" name="Google Shape;195;p5:notes"/>
           <p:cNvSpPr/>
           <p:nvPr>
             <p:ph idx="2" type="sldImg"/>
@@ -1826,7 +1826,7 @@
   <p:cSld>
     <p:spTree>
       <p:nvGrpSpPr>
-        <p:cNvPr id="215" name="Shape 215"/>
+        <p:cNvPr id="216" name="Shape 216"/>
         <p:cNvGrpSpPr/>
         <p:nvPr/>
       </p:nvGrpSpPr>
@@ -1840,7 +1840,7 @@
       </p:grpSpPr>
       <p:sp>
         <p:nvSpPr>
-          <p:cNvPr id="216" name="Google Shape;216;p6:notes"/>
+          <p:cNvPr id="217" name="Google Shape;217;p6:notes"/>
           <p:cNvSpPr txBox="1"/>
           <p:nvPr>
             <p:ph idx="1" type="body"/>
@@ -1879,7 +1879,7 @@
       </p:sp>
       <p:sp>
         <p:nvSpPr>
-          <p:cNvPr id="217" name="Google Shape;217;p6:notes"/>
+          <p:cNvPr id="218" name="Google Shape;218;p6:notes"/>
           <p:cNvSpPr/>
           <p:nvPr>
             <p:ph idx="2" type="sldImg"/>
@@ -11839,7 +11839,7 @@
     </p:bg>
     <p:spTree>
       <p:nvGrpSpPr>
-        <p:cNvPr id="229" name="Shape 229"/>
+        <p:cNvPr id="230" name="Shape 230"/>
         <p:cNvGrpSpPr/>
         <p:nvPr/>
       </p:nvGrpSpPr>
@@ -11853,7 +11853,7 @@
       </p:grpSpPr>
       <p:pic>
         <p:nvPicPr>
-          <p:cNvPr descr="image.png" id="230" name="Google Shape;230;p22"/>
+          <p:cNvPr descr="image.png" id="231" name="Google Shape;231;p22"/>
           <p:cNvPicPr preferRelativeResize="0"/>
           <p:nvPr/>
         </p:nvPicPr>
@@ -11880,7 +11880,7 @@
       </p:pic>
       <p:pic>
         <p:nvPicPr>
-          <p:cNvPr descr="image.png" id="231" name="Google Shape;231;p22"/>
+          <p:cNvPr descr="image.png" id="232" name="Google Shape;232;p22"/>
           <p:cNvPicPr preferRelativeResize="0"/>
           <p:nvPr/>
         </p:nvPicPr>
@@ -11907,7 +11907,7 @@
       </p:pic>
       <p:sp>
         <p:nvSpPr>
-          <p:cNvPr id="232" name="Google Shape;232;p22"/>
+          <p:cNvPr id="233" name="Google Shape;233;p22"/>
           <p:cNvSpPr txBox="1"/>
           <p:nvPr/>
         </p:nvSpPr>
@@ -11957,7 +11957,7 @@
       </p:sp>
       <p:sp>
         <p:nvSpPr>
-          <p:cNvPr id="233" name="Google Shape;233;p22"/>
+          <p:cNvPr id="234" name="Google Shape;234;p22"/>
           <p:cNvSpPr/>
           <p:nvPr/>
         </p:nvSpPr>
@@ -12008,7 +12008,7 @@
       </p:sp>
       <p:sp>
         <p:nvSpPr>
-          <p:cNvPr id="234" name="Google Shape;234;p22"/>
+          <p:cNvPr id="235" name="Google Shape;235;p22"/>
           <p:cNvSpPr/>
           <p:nvPr/>
         </p:nvSpPr>
@@ -12074,7 +12074,7 @@
       </p:sp>
       <p:graphicFrame>
         <p:nvGraphicFramePr>
-          <p:cNvPr id="235" name="Google Shape;235;p22"/>
+          <p:cNvPr id="236" name="Google Shape;236;p22"/>
           <p:cNvGraphicFramePr/>
           <p:nvPr/>
         </p:nvGraphicFramePr>
@@ -12087,7 +12087,7 @@
             <a:tbl>
               <a:tblPr bandRow="1" firstRow="1">
                 <a:noFill/>
-                <a:tableStyleId>{AD8E68D7-74BA-4D39-A1ED-292BA871F60B}</a:tableStyleId>
+                <a:tableStyleId>{C40970EA-49EF-4EA7-A465-39A10629B167}</a:tableStyleId>
               </a:tblPr>
               <a:tblGrid>
                 <a:gridCol w="3135075"/>
@@ -13259,7 +13259,7 @@
       </p:graphicFrame>
       <p:sp>
         <p:nvSpPr>
-          <p:cNvPr id="236" name="Google Shape;236;p22"/>
+          <p:cNvPr id="237" name="Google Shape;237;p22"/>
           <p:cNvSpPr txBox="1"/>
           <p:nvPr/>
         </p:nvSpPr>
@@ -13309,65 +13309,14 @@
       </p:sp>
       <p:sp>
         <p:nvSpPr>
-          <p:cNvPr id="237" name="Google Shape;237;p22"/>
-          <p:cNvSpPr/>
-          <p:nvPr/>
-        </p:nvSpPr>
-        <p:spPr>
-          <a:xfrm>
-            <a:off x="571500" y="2185987"/>
-            <a:ext cx="3135064" cy="9525"/>
-          </a:xfrm>
-          <a:prstGeom prst="rect">
-            <a:avLst/>
-          </a:prstGeom>
-          <a:solidFill>
-            <a:srgbClr val="F1F5F9"/>
-          </a:solidFill>
-          <a:ln>
-            <a:noFill/>
-          </a:ln>
-        </p:spPr>
-        <p:txBody>
-          <a:bodyPr anchorCtr="0" anchor="ctr" bIns="45700" lIns="91425" spcFirstLastPara="1" rIns="91425" wrap="square" tIns="45700">
-            <a:noAutofit/>
-          </a:bodyPr>
-          <a:lstStyle/>
-          <a:p>
-            <a:pPr indent="0" lvl="0" marL="0" marR="0" rtl="0" algn="ctr">
-              <a:spcBef>
-                <a:spcPts val="0"/>
-              </a:spcBef>
-              <a:spcAft>
-                <a:spcPts val="0"/>
-              </a:spcAft>
-              <a:buNone/>
-            </a:pPr>
-            <a:r>
-              <a:t/>
-            </a:r>
-            <a:endParaRPr b="0" i="0" sz="1800" u="none" cap="none" strike="noStrike">
-              <a:solidFill>
-                <a:schemeClr val="dk1"/>
-              </a:solidFill>
-              <a:latin typeface="Calibri"/>
-              <a:ea typeface="Calibri"/>
-              <a:cs typeface="Calibri"/>
-              <a:sym typeface="Calibri"/>
-            </a:endParaRPr>
-          </a:p>
-        </p:txBody>
-      </p:sp>
-      <p:sp>
-        <p:nvSpPr>
           <p:cNvPr id="238" name="Google Shape;238;p22"/>
           <p:cNvSpPr/>
           <p:nvPr/>
         </p:nvSpPr>
         <p:spPr>
           <a:xfrm>
-            <a:off x="3706564" y="2185987"/>
-            <a:ext cx="2677417" cy="9525"/>
+            <a:off x="571500" y="2185987"/>
+            <a:ext cx="3135064" cy="9525"/>
           </a:xfrm>
           <a:prstGeom prst="rect">
             <a:avLst/>
@@ -13417,8 +13366,8 @@
         </p:nvSpPr>
         <p:spPr>
           <a:xfrm>
-            <a:off x="6383982" y="2185987"/>
-            <a:ext cx="5236517" cy="9525"/>
+            <a:off x="3706564" y="2185987"/>
+            <a:ext cx="2677417" cy="9525"/>
           </a:xfrm>
           <a:prstGeom prst="rect">
             <a:avLst/>
@@ -13468,8 +13417,8 @@
         </p:nvSpPr>
         <p:spPr>
           <a:xfrm>
-            <a:off x="571500" y="2681287"/>
-            <a:ext cx="3135064" cy="9525"/>
+            <a:off x="6383982" y="2185987"/>
+            <a:ext cx="5236517" cy="9525"/>
           </a:xfrm>
           <a:prstGeom prst="rect">
             <a:avLst/>
@@ -13519,8 +13468,8 @@
         </p:nvSpPr>
         <p:spPr>
           <a:xfrm>
-            <a:off x="3706564" y="2681287"/>
-            <a:ext cx="2677417" cy="9525"/>
+            <a:off x="571500" y="2681287"/>
+            <a:ext cx="3135064" cy="9525"/>
           </a:xfrm>
           <a:prstGeom prst="rect">
             <a:avLst/>
@@ -13570,8 +13519,8 @@
         </p:nvSpPr>
         <p:spPr>
           <a:xfrm>
-            <a:off x="6383982" y="2681287"/>
-            <a:ext cx="5236517" cy="9525"/>
+            <a:off x="3706564" y="2681287"/>
+            <a:ext cx="2677417" cy="9525"/>
           </a:xfrm>
           <a:prstGeom prst="rect">
             <a:avLst/>
@@ -13621,8 +13570,8 @@
         </p:nvSpPr>
         <p:spPr>
           <a:xfrm>
-            <a:off x="571500" y="3176587"/>
-            <a:ext cx="3135064" cy="9525"/>
+            <a:off x="6383982" y="2681287"/>
+            <a:ext cx="5236517" cy="9525"/>
           </a:xfrm>
           <a:prstGeom prst="rect">
             <a:avLst/>
@@ -13672,8 +13621,8 @@
         </p:nvSpPr>
         <p:spPr>
           <a:xfrm>
-            <a:off x="3706564" y="3176587"/>
-            <a:ext cx="2677417" cy="9525"/>
+            <a:off x="571500" y="3176587"/>
+            <a:ext cx="3135064" cy="9525"/>
           </a:xfrm>
           <a:prstGeom prst="rect">
             <a:avLst/>
@@ -13723,8 +13672,8 @@
         </p:nvSpPr>
         <p:spPr>
           <a:xfrm>
-            <a:off x="6383982" y="3176587"/>
-            <a:ext cx="5236517" cy="9525"/>
+            <a:off x="3706564" y="3176587"/>
+            <a:ext cx="2677417" cy="9525"/>
           </a:xfrm>
           <a:prstGeom prst="rect">
             <a:avLst/>
@@ -13774,8 +13723,8 @@
         </p:nvSpPr>
         <p:spPr>
           <a:xfrm>
-            <a:off x="571500" y="3671887"/>
-            <a:ext cx="3135064" cy="9525"/>
+            <a:off x="6383982" y="3176587"/>
+            <a:ext cx="5236517" cy="9525"/>
           </a:xfrm>
           <a:prstGeom prst="rect">
             <a:avLst/>
@@ -13825,8 +13774,8 @@
         </p:nvSpPr>
         <p:spPr>
           <a:xfrm>
-            <a:off x="3706564" y="3671887"/>
-            <a:ext cx="2677417" cy="9525"/>
+            <a:off x="571500" y="3671887"/>
+            <a:ext cx="3135064" cy="9525"/>
           </a:xfrm>
           <a:prstGeom prst="rect">
             <a:avLst/>
@@ -13871,6 +13820,57 @@
       <p:sp>
         <p:nvSpPr>
           <p:cNvPr id="248" name="Google Shape;248;p22"/>
+          <p:cNvSpPr/>
+          <p:nvPr/>
+        </p:nvSpPr>
+        <p:spPr>
+          <a:xfrm>
+            <a:off x="3706564" y="3671887"/>
+            <a:ext cx="2677417" cy="9525"/>
+          </a:xfrm>
+          <a:prstGeom prst="rect">
+            <a:avLst/>
+          </a:prstGeom>
+          <a:solidFill>
+            <a:srgbClr val="F1F5F9"/>
+          </a:solidFill>
+          <a:ln>
+            <a:noFill/>
+          </a:ln>
+        </p:spPr>
+        <p:txBody>
+          <a:bodyPr anchorCtr="0" anchor="ctr" bIns="45700" lIns="91425" spcFirstLastPara="1" rIns="91425" wrap="square" tIns="45700">
+            <a:noAutofit/>
+          </a:bodyPr>
+          <a:lstStyle/>
+          <a:p>
+            <a:pPr indent="0" lvl="0" marL="0" marR="0" rtl="0" algn="ctr">
+              <a:spcBef>
+                <a:spcPts val="0"/>
+              </a:spcBef>
+              <a:spcAft>
+                <a:spcPts val="0"/>
+              </a:spcAft>
+              <a:buNone/>
+            </a:pPr>
+            <a:r>
+              <a:t/>
+            </a:r>
+            <a:endParaRPr b="0" i="0" sz="1800" u="none" cap="none" strike="noStrike">
+              <a:solidFill>
+                <a:schemeClr val="dk1"/>
+              </a:solidFill>
+              <a:latin typeface="Calibri"/>
+              <a:ea typeface="Calibri"/>
+              <a:cs typeface="Calibri"/>
+              <a:sym typeface="Calibri"/>
+            </a:endParaRPr>
+          </a:p>
+        </p:txBody>
+      </p:sp>
+      <p:sp>
+        <p:nvSpPr>
+          <p:cNvPr id="249" name="Google Shape;249;p22"/>
           <p:cNvSpPr/>
           <p:nvPr/>
         </p:nvSpPr>
@@ -13932,7 +13932,7 @@
   <p:cSld>
     <p:spTree>
       <p:nvGrpSpPr>
-        <p:cNvPr id="252" name="Shape 252"/>
+        <p:cNvPr id="253" name="Shape 253"/>
         <p:cNvGrpSpPr/>
         <p:nvPr/>
       </p:nvGrpSpPr>
@@ -13946,7 +13946,7 @@
       </p:grpSpPr>
       <p:pic>
         <p:nvPicPr>
-          <p:cNvPr descr="image.png" id="253" name="Google Shape;253;p23"/>
+          <p:cNvPr descr="image.png" id="254" name="Google Shape;254;p23"/>
           <p:cNvPicPr preferRelativeResize="0"/>
           <p:nvPr/>
         </p:nvPicPr>
@@ -13973,7 +13973,7 @@
       </p:pic>
       <p:pic>
         <p:nvPicPr>
-          <p:cNvPr descr="image.png" id="254" name="Google Shape;254;p23"/>
+          <p:cNvPr descr="image.png" id="255" name="Google Shape;255;p23"/>
           <p:cNvPicPr preferRelativeResize="0"/>
           <p:nvPr/>
         </p:nvPicPr>
@@ -13987,7 +13987,7 @@
         <p:spPr>
           <a:xfrm>
             <a:off x="704850" y="1752600"/>
-            <a:ext cx="5267325" cy="3619500"/>
+            <a:ext cx="5267325" cy="2607925"/>
           </a:xfrm>
           <a:prstGeom prst="rect">
             <a:avLst/>
@@ -14000,7 +14000,7 @@
       </p:pic>
       <p:pic>
         <p:nvPicPr>
-          <p:cNvPr descr="image.png" id="255" name="Google Shape;255;p23"/>
+          <p:cNvPr descr="image.png" id="256" name="Google Shape;256;p23"/>
           <p:cNvPicPr preferRelativeResize="0"/>
           <p:nvPr/>
         </p:nvPicPr>
@@ -14013,7 +14013,7 @@
         </p:blipFill>
         <p:spPr>
           <a:xfrm>
-            <a:off x="704850" y="5610225"/>
+            <a:off x="704850" y="4819811"/>
             <a:ext cx="5267325" cy="523875"/>
           </a:xfrm>
           <a:prstGeom prst="rect">
@@ -14027,7 +14027,7 @@
       </p:pic>
       <p:pic>
         <p:nvPicPr>
-          <p:cNvPr descr="image.png" id="256" name="Google Shape;256;p23"/>
+          <p:cNvPr descr="image.png" id="257" name="Google Shape;257;p23"/>
           <p:cNvPicPr preferRelativeResize="0"/>
           <p:nvPr/>
         </p:nvPicPr>
@@ -14054,7 +14054,7 @@
       </p:pic>
       <p:pic>
         <p:nvPicPr>
-          <p:cNvPr descr="image.png" id="257" name="Google Shape;257;p23"/>
+          <p:cNvPr descr="image.png" id="258" name="Google Shape;258;p23"/>
           <p:cNvPicPr preferRelativeResize="0"/>
           <p:nvPr/>
         </p:nvPicPr>
@@ -14081,7 +14081,7 @@
       </p:pic>
       <p:sp>
         <p:nvSpPr>
-          <p:cNvPr id="258" name="Google Shape;258;p23"/>
+          <p:cNvPr id="259" name="Google Shape;259;p23"/>
           <p:cNvSpPr/>
           <p:nvPr/>
         </p:nvSpPr>
@@ -14132,7 +14132,7 @@
       </p:sp>
       <p:sp>
         <p:nvSpPr>
-          <p:cNvPr id="259" name="Google Shape;259;p23"/>
+          <p:cNvPr id="260" name="Google Shape;260;p23"/>
           <p:cNvSpPr txBox="1"/>
           <p:nvPr/>
         </p:nvSpPr>
@@ -14182,7 +14182,7 @@
       </p:sp>
       <p:sp>
         <p:nvSpPr>
-          <p:cNvPr id="260" name="Google Shape;260;p23"/>
+          <p:cNvPr id="261" name="Google Shape;261;p23"/>
           <p:cNvSpPr/>
           <p:nvPr/>
         </p:nvSpPr>
@@ -14233,7 +14233,7 @@
       </p:sp>
       <p:sp>
         <p:nvSpPr>
-          <p:cNvPr id="261" name="Google Shape;261;p23"/>
+          <p:cNvPr id="262" name="Google Shape;262;p23"/>
           <p:cNvSpPr txBox="1"/>
           <p:nvPr/>
         </p:nvSpPr>
@@ -14283,7 +14283,7 @@
       </p:sp>
       <p:sp>
         <p:nvSpPr>
-          <p:cNvPr id="262" name="Google Shape;262;p23"/>
+          <p:cNvPr id="263" name="Google Shape;263;p23"/>
           <p:cNvSpPr txBox="1"/>
           <p:nvPr/>
         </p:nvSpPr>
@@ -14333,7 +14333,7 @@
       </p:sp>
       <p:sp>
         <p:nvSpPr>
-          <p:cNvPr id="263" name="Google Shape;263;p23"/>
+          <p:cNvPr id="264" name="Google Shape;264;p23"/>
           <p:cNvSpPr txBox="1"/>
           <p:nvPr/>
         </p:nvSpPr>
@@ -14383,7 +14383,7 @@
       </p:sp>
       <p:sp>
         <p:nvSpPr>
-          <p:cNvPr id="264" name="Google Shape;264;p23"/>
+          <p:cNvPr id="265" name="Google Shape;265;p23"/>
           <p:cNvSpPr txBox="1"/>
           <p:nvPr/>
         </p:nvSpPr>
@@ -14433,7 +14433,7 @@
       </p:sp>
       <p:pic>
         <p:nvPicPr>
-          <p:cNvPr descr="image.png" id="265" name="Google Shape;265;p23"/>
+          <p:cNvPr descr="image.png" id="266" name="Google Shape;266;p23"/>
           <p:cNvPicPr preferRelativeResize="0"/>
           <p:nvPr/>
         </p:nvPicPr>
@@ -14460,7 +14460,7 @@
       </p:pic>
       <p:sp>
         <p:nvSpPr>
-          <p:cNvPr id="266" name="Google Shape;266;p23"/>
+          <p:cNvPr id="267" name="Google Shape;267;p23"/>
           <p:cNvSpPr txBox="1"/>
           <p:nvPr/>
         </p:nvSpPr>
@@ -14513,7 +14513,7 @@
       </p:sp>
       <p:sp>
         <p:nvSpPr>
-          <p:cNvPr id="267" name="Google Shape;267;p23"/>
+          <p:cNvPr id="268" name="Google Shape;268;p23"/>
           <p:cNvSpPr txBox="1"/>
           <p:nvPr/>
         </p:nvSpPr>
@@ -14566,7 +14566,7 @@
       </p:sp>
       <p:sp>
         <p:nvSpPr>
-          <p:cNvPr id="268" name="Google Shape;268;p23"/>
+          <p:cNvPr id="269" name="Google Shape;269;p23"/>
           <p:cNvSpPr txBox="1"/>
           <p:nvPr/>
         </p:nvSpPr>
@@ -14631,7 +14631,7 @@
       </p:sp>
       <p:sp>
         <p:nvSpPr>
-          <p:cNvPr id="269" name="Google Shape;269;p23"/>
+          <p:cNvPr id="270" name="Google Shape;270;p23"/>
           <p:cNvSpPr txBox="1"/>
           <p:nvPr/>
         </p:nvSpPr>
@@ -14696,7 +14696,7 @@
       </p:sp>
       <p:sp>
         <p:nvSpPr>
-          <p:cNvPr id="270" name="Google Shape;270;p23"/>
+          <p:cNvPr id="271" name="Google Shape;271;p23"/>
           <p:cNvSpPr txBox="1"/>
           <p:nvPr/>
         </p:nvSpPr>
@@ -14749,7 +14749,7 @@
       </p:sp>
       <p:sp>
         <p:nvSpPr>
-          <p:cNvPr id="271" name="Google Shape;271;p23"/>
+          <p:cNvPr id="272" name="Google Shape;272;p23"/>
           <p:cNvSpPr txBox="1"/>
           <p:nvPr/>
         </p:nvSpPr>
@@ -14802,7 +14802,7 @@
       </p:sp>
       <p:sp>
         <p:nvSpPr>
-          <p:cNvPr id="272" name="Google Shape;272;p23"/>
+          <p:cNvPr id="273" name="Google Shape;273;p23"/>
           <p:cNvSpPr txBox="1"/>
           <p:nvPr/>
         </p:nvSpPr>
@@ -14855,7 +14855,7 @@
       </p:sp>
       <p:sp>
         <p:nvSpPr>
-          <p:cNvPr id="273" name="Google Shape;273;p23"/>
+          <p:cNvPr id="274" name="Google Shape;274;p23"/>
           <p:cNvSpPr txBox="1"/>
           <p:nvPr/>
         </p:nvSpPr>
@@ -14908,7 +14908,7 @@
       </p:sp>
       <p:sp>
         <p:nvSpPr>
-          <p:cNvPr id="274" name="Google Shape;274;p23"/>
+          <p:cNvPr id="275" name="Google Shape;275;p23"/>
           <p:cNvSpPr txBox="1"/>
           <p:nvPr/>
         </p:nvSpPr>
@@ -14961,66 +14961,13 @@
       </p:sp>
       <p:sp>
         <p:nvSpPr>
-          <p:cNvPr id="275" name="Google Shape;275;p23"/>
-          <p:cNvSpPr txBox="1"/>
-          <p:nvPr/>
-        </p:nvSpPr>
-        <p:spPr>
-          <a:xfrm>
-            <a:off x="1085850" y="2505075"/>
-            <a:ext cx="57300" cy="184800"/>
-          </a:xfrm>
-          <a:prstGeom prst="rect">
-            <a:avLst/>
-          </a:prstGeom>
-          <a:noFill/>
-          <a:ln>
-            <a:noFill/>
-          </a:ln>
-        </p:spPr>
-        <p:txBody>
-          <a:bodyPr anchorCtr="0" anchor="t" bIns="0" lIns="0" spcFirstLastPara="1" rIns="0" wrap="square" tIns="0">
-            <a:spAutoFit/>
-          </a:bodyPr>
-          <a:lstStyle/>
-          <a:p>
-            <a:pPr indent="0" lvl="0" marL="0" marR="0" rtl="0" algn="l">
-              <a:lnSpc>
-                <a:spcPct val="180000"/>
-              </a:lnSpc>
-              <a:spcBef>
-                <a:spcPts val="0"/>
-              </a:spcBef>
-              <a:spcAft>
-                <a:spcPts val="0"/>
-              </a:spcAft>
-              <a:buNone/>
-            </a:pPr>
-            <a:r>
-              <a:rPr b="0" i="0" lang="en-US" sz="1200" u="none" cap="none" strike="noStrike">
-                <a:solidFill>
-                  <a:srgbClr val="64748B"/>
-                </a:solidFill>
-                <a:latin typeface="Lato"/>
-                <a:ea typeface="Lato"/>
-                <a:cs typeface="Lato"/>
-                <a:sym typeface="Lato"/>
-              </a:rPr>
-              <a:t>-</a:t>
-            </a:r>
-            <a:endParaRPr/>
-          </a:p>
-        </p:txBody>
-      </p:sp>
-      <p:sp>
-        <p:nvSpPr>
           <p:cNvPr id="276" name="Google Shape;276;p23"/>
           <p:cNvSpPr txBox="1"/>
           <p:nvPr/>
         </p:nvSpPr>
         <p:spPr>
           <a:xfrm>
-            <a:off x="1085850" y="2874615"/>
+            <a:off x="1085850" y="2505075"/>
             <a:ext cx="57300" cy="184800"/>
           </a:xfrm>
           <a:prstGeom prst="rect">
@@ -15073,7 +15020,7 @@
         </p:nvSpPr>
         <p:spPr>
           <a:xfrm>
-            <a:off x="1085850" y="3244155"/>
+            <a:off x="1085850" y="2874615"/>
             <a:ext cx="57300" cy="184800"/>
           </a:xfrm>
           <a:prstGeom prst="rect">
@@ -15126,7 +15073,7 @@
         </p:nvSpPr>
         <p:spPr>
           <a:xfrm>
-            <a:off x="1085850" y="3613695"/>
+            <a:off x="1085850" y="3244155"/>
             <a:ext cx="57300" cy="184800"/>
           </a:xfrm>
           <a:prstGeom prst="rect">
@@ -15174,6 +15121,59 @@
       <p:sp>
         <p:nvSpPr>
           <p:cNvPr id="279" name="Google Shape;279;p23"/>
+          <p:cNvSpPr txBox="1"/>
+          <p:nvPr/>
+        </p:nvSpPr>
+        <p:spPr>
+          <a:xfrm>
+            <a:off x="1085850" y="3613695"/>
+            <a:ext cx="57300" cy="184800"/>
+          </a:xfrm>
+          <a:prstGeom prst="rect">
+            <a:avLst/>
+          </a:prstGeom>
+          <a:noFill/>
+          <a:ln>
+            <a:noFill/>
+          </a:ln>
+        </p:spPr>
+        <p:txBody>
+          <a:bodyPr anchorCtr="0" anchor="t" bIns="0" lIns="0" spcFirstLastPara="1" rIns="0" wrap="square" tIns="0">
+            <a:spAutoFit/>
+          </a:bodyPr>
+          <a:lstStyle/>
+          <a:p>
+            <a:pPr indent="0" lvl="0" marL="0" marR="0" rtl="0" algn="l">
+              <a:lnSpc>
+                <a:spcPct val="180000"/>
+              </a:lnSpc>
+              <a:spcBef>
+                <a:spcPts val="0"/>
+              </a:spcBef>
+              <a:spcAft>
+                <a:spcPts val="0"/>
+              </a:spcAft>
+              <a:buNone/>
+            </a:pPr>
+            <a:r>
+              <a:rPr b="0" i="0" lang="en-US" sz="1200" u="none" cap="none" strike="noStrike">
+                <a:solidFill>
+                  <a:srgbClr val="64748B"/>
+                </a:solidFill>
+                <a:latin typeface="Lato"/>
+                <a:ea typeface="Lato"/>
+                <a:cs typeface="Lato"/>
+                <a:sym typeface="Lato"/>
+              </a:rPr>
+              <a:t>-</a:t>
+            </a:r>
+            <a:endParaRPr/>
+          </a:p>
+        </p:txBody>
+      </p:sp>
+      <p:sp>
+        <p:nvSpPr>
+          <p:cNvPr id="280" name="Google Shape;280;p23"/>
           <p:cNvSpPr txBox="1"/>
           <p:nvPr/>
         </p:nvSpPr>
@@ -15244,7 +15244,7 @@
     </p:bg>
     <p:spTree>
       <p:nvGrpSpPr>
-        <p:cNvPr id="283" name="Shape 283"/>
+        <p:cNvPr id="284" name="Shape 284"/>
         <p:cNvGrpSpPr/>
         <p:nvPr/>
       </p:nvGrpSpPr>
@@ -15258,7 +15258,7 @@
       </p:grpSpPr>
       <p:pic>
         <p:nvPicPr>
-          <p:cNvPr descr="image.png" id="284" name="Google Shape;284;p24"/>
+          <p:cNvPr descr="image.png" id="285" name="Google Shape;285;p24"/>
           <p:cNvPicPr preferRelativeResize="0"/>
           <p:nvPr/>
         </p:nvPicPr>
@@ -15285,7 +15285,7 @@
       </p:pic>
       <p:sp>
         <p:nvSpPr>
-          <p:cNvPr id="285" name="Google Shape;285;p24"/>
+          <p:cNvPr id="286" name="Google Shape;286;p24"/>
           <p:cNvSpPr txBox="1"/>
           <p:nvPr/>
         </p:nvSpPr>
@@ -15335,7 +15335,7 @@
       </p:sp>
       <p:sp>
         <p:nvSpPr>
-          <p:cNvPr id="286" name="Google Shape;286;p24"/>
+          <p:cNvPr id="287" name="Google Shape;287;p24"/>
           <p:cNvSpPr txBox="1"/>
           <p:nvPr/>
         </p:nvSpPr>
@@ -15472,7 +15472,7 @@
       </p:sp>
       <p:sp>
         <p:nvSpPr>
-          <p:cNvPr id="287" name="Google Shape;287;p24"/>
+          <p:cNvPr id="288" name="Google Shape;288;p24"/>
           <p:cNvSpPr/>
           <p:nvPr/>
         </p:nvSpPr>
@@ -15523,7 +15523,7 @@
       </p:sp>
       <p:sp>
         <p:nvSpPr>
-          <p:cNvPr id="288" name="Google Shape;288;p24"/>
+          <p:cNvPr id="289" name="Google Shape;289;p24"/>
           <p:cNvSpPr txBox="1"/>
           <p:nvPr/>
         </p:nvSpPr>
@@ -17164,7 +17164,7 @@
             <a:tbl>
               <a:tblPr bandRow="1" firstRow="1">
                 <a:noFill/>
-                <a:tableStyleId>{78F91951-BCB5-4D53-B7BF-BF1AAAE377F3}</a:tableStyleId>
+                <a:tableStyleId>{E2260C61-CE91-4B28-B6FE-A447DA7DB62E}</a:tableStyleId>
               </a:tblPr>
               <a:tblGrid>
                 <a:gridCol w="1755125"/>
@@ -18743,7 +18743,7 @@
         </p:nvSpPr>
         <p:spPr>
           <a:xfrm>
-            <a:off x="7522219" y="5399242"/>
+            <a:off x="7522219" y="5270251"/>
             <a:ext cx="3765000" cy="184800"/>
           </a:xfrm>
           <a:prstGeom prst="rect">
@@ -18808,7 +18808,7 @@
         </p:nvSpPr>
         <p:spPr>
           <a:xfrm>
-            <a:off x="7522219" y="5704042"/>
+            <a:off x="7522219" y="5575051"/>
             <a:ext cx="3765000" cy="184800"/>
           </a:xfrm>
           <a:prstGeom prst="rect">
@@ -18873,7 +18873,7 @@
         </p:nvSpPr>
         <p:spPr>
           <a:xfrm>
-            <a:off x="7522219" y="6008842"/>
+            <a:off x="7522219" y="5879851"/>
             <a:ext cx="3765000" cy="184800"/>
           </a:xfrm>
           <a:prstGeom prst="rect">
@@ -18968,7 +18968,28 @@
               <a:buNone/>
             </a:pPr>
             <a:r>
-              <a:t/>
+              <a:rPr b="1" i="0" lang="en-US" sz="1200" u="none" cap="none" strike="noStrike">
+                <a:solidFill>
+                  <a:srgbClr val="1E293B"/>
+                </a:solidFill>
+                <a:latin typeface="Lato"/>
+                <a:ea typeface="Lato"/>
+                <a:cs typeface="Lato"/>
+                <a:sym typeface="Lato"/>
+              </a:rPr>
+              <a:t>Rain:</a:t>
+            </a:r>
+            <a:r>
+              <a:rPr b="0" i="0" lang="en-US" sz="1200" u="none" cap="none" strike="noStrike">
+                <a:solidFill>
+                  <a:srgbClr val="475569"/>
+                </a:solidFill>
+                <a:latin typeface="Lato"/>
+                <a:ea typeface="Lato"/>
+                <a:cs typeface="Lato"/>
+                <a:sym typeface="Lato"/>
+              </a:rPr>
+              <a:t> 509 / 517 records have zero rain (98.5%)</a:t>
             </a:r>
             <a:endParaRPr/>
           </a:p>
@@ -19896,6 +19917,79 @@
           </a:p>
         </p:txBody>
       </p:sp>
+      <p:sp>
+        <p:nvSpPr>
+          <p:cNvPr id="159" name="Google Shape;159;p16"/>
+          <p:cNvSpPr txBox="1"/>
+          <p:nvPr/>
+        </p:nvSpPr>
+        <p:spPr>
+          <a:xfrm>
+            <a:off x="7522219" y="6204232"/>
+            <a:ext cx="3765000" cy="184800"/>
+          </a:xfrm>
+          <a:prstGeom prst="rect">
+            <a:avLst/>
+          </a:prstGeom>
+          <a:noFill/>
+          <a:ln>
+            <a:noFill/>
+          </a:ln>
+        </p:spPr>
+        <p:txBody>
+          <a:bodyPr anchorCtr="0" anchor="t" bIns="0" lIns="0" spcFirstLastPara="1" rIns="0" wrap="square" tIns="0">
+            <a:spAutoFit/>
+          </a:bodyPr>
+          <a:lstStyle/>
+          <a:p>
+            <a:pPr indent="0" lvl="0" marL="0" marR="0" rtl="0" algn="l">
+              <a:lnSpc>
+                <a:spcPct val="200000"/>
+              </a:lnSpc>
+              <a:spcBef>
+                <a:spcPts val="0"/>
+              </a:spcBef>
+              <a:spcAft>
+                <a:spcPts val="0"/>
+              </a:spcAft>
+              <a:buNone/>
+            </a:pPr>
+            <a:r>
+              <a:rPr b="1" lang="en-US" sz="1200">
+                <a:solidFill>
+                  <a:srgbClr val="1E293B"/>
+                </a:solidFill>
+                <a:latin typeface="Lato"/>
+                <a:ea typeface="Lato"/>
+                <a:cs typeface="Lato"/>
+                <a:sym typeface="Lato"/>
+              </a:rPr>
+              <a:t>Rain: </a:t>
+            </a:r>
+            <a:r>
+              <a:rPr lang="en-US" sz="1200">
+                <a:solidFill>
+                  <a:srgbClr val="475569"/>
+                </a:solidFill>
+                <a:latin typeface="Lato"/>
+                <a:ea typeface="Lato"/>
+                <a:cs typeface="Lato"/>
+                <a:sym typeface="Lato"/>
+              </a:rPr>
+              <a:t>509 / 517 records have zero rain (98.5%)</a:t>
+            </a:r>
+            <a:endParaRPr sz="1200">
+              <a:solidFill>
+                <a:srgbClr val="475569"/>
+              </a:solidFill>
+              <a:latin typeface="Lato"/>
+              <a:ea typeface="Lato"/>
+              <a:cs typeface="Lato"/>
+              <a:sym typeface="Lato"/>
+            </a:endParaRPr>
+          </a:p>
+        </p:txBody>
+      </p:sp>
     </p:spTree>
   </p:cSld>
   <p:clrMapOvr>
@@ -19916,7 +20010,7 @@
     </p:bg>
     <p:spTree>
       <p:nvGrpSpPr>
-        <p:cNvPr id="162" name="Shape 162"/>
+        <p:cNvPr id="163" name="Shape 163"/>
         <p:cNvGrpSpPr/>
         <p:nvPr/>
       </p:nvGrpSpPr>
@@ -19930,7 +20024,7 @@
       </p:grpSpPr>
       <p:pic>
         <p:nvPicPr>
-          <p:cNvPr descr="image.png" id="163" name="Google Shape;163;p17"/>
+          <p:cNvPr descr="image.png" id="164" name="Google Shape;164;p17"/>
           <p:cNvPicPr preferRelativeResize="0"/>
           <p:nvPr/>
         </p:nvPicPr>
@@ -19957,7 +20051,7 @@
       </p:pic>
       <p:pic>
         <p:nvPicPr>
-          <p:cNvPr descr="image.png" id="164" name="Google Shape;164;p17"/>
+          <p:cNvPr descr="image.png" id="165" name="Google Shape;165;p17"/>
           <p:cNvPicPr preferRelativeResize="0"/>
           <p:nvPr/>
         </p:nvPicPr>
@@ -19984,7 +20078,7 @@
       </p:pic>
       <p:sp>
         <p:nvSpPr>
-          <p:cNvPr id="165" name="Google Shape;165;p17"/>
+          <p:cNvPr id="166" name="Google Shape;166;p17"/>
           <p:cNvSpPr txBox="1"/>
           <p:nvPr/>
         </p:nvSpPr>
@@ -20034,7 +20128,7 @@
       </p:sp>
       <p:sp>
         <p:nvSpPr>
-          <p:cNvPr id="166" name="Google Shape;166;p17"/>
+          <p:cNvPr id="167" name="Google Shape;167;p17"/>
           <p:cNvSpPr/>
           <p:nvPr/>
         </p:nvSpPr>
@@ -20085,7 +20179,7 @@
       </p:sp>
       <p:sp>
         <p:nvSpPr>
-          <p:cNvPr id="167" name="Google Shape;167;p17"/>
+          <p:cNvPr id="168" name="Google Shape;168;p17"/>
           <p:cNvSpPr txBox="1"/>
           <p:nvPr/>
         </p:nvSpPr>
@@ -20135,7 +20229,7 @@
       </p:sp>
       <p:sp>
         <p:nvSpPr>
-          <p:cNvPr id="168" name="Google Shape;168;p17"/>
+          <p:cNvPr id="169" name="Google Shape;169;p17"/>
           <p:cNvSpPr txBox="1"/>
           <p:nvPr/>
         </p:nvSpPr>
@@ -20194,7 +20288,7 @@
     </p:bg>
     <p:spTree>
       <p:nvGrpSpPr>
-        <p:cNvPr id="172" name="Shape 172"/>
+        <p:cNvPr id="173" name="Shape 173"/>
         <p:cNvGrpSpPr/>
         <p:nvPr/>
       </p:nvGrpSpPr>
@@ -20208,7 +20302,7 @@
       </p:grpSpPr>
       <p:pic>
         <p:nvPicPr>
-          <p:cNvPr descr="image.png" id="173" name="Google Shape;173;p18"/>
+          <p:cNvPr descr="image.png" id="174" name="Google Shape;174;p18"/>
           <p:cNvPicPr preferRelativeResize="0"/>
           <p:nvPr/>
         </p:nvPicPr>
@@ -20235,7 +20329,7 @@
       </p:pic>
       <p:pic>
         <p:nvPicPr>
-          <p:cNvPr descr="image.png" id="174" name="Google Shape;174;p18"/>
+          <p:cNvPr descr="image.png" id="175" name="Google Shape;175;p18"/>
           <p:cNvPicPr preferRelativeResize="0"/>
           <p:nvPr/>
         </p:nvPicPr>
@@ -20262,7 +20356,7 @@
       </p:pic>
       <p:sp>
         <p:nvSpPr>
-          <p:cNvPr id="175" name="Google Shape;175;p18"/>
+          <p:cNvPr id="176" name="Google Shape;176;p18"/>
           <p:cNvSpPr txBox="1"/>
           <p:nvPr/>
         </p:nvSpPr>
@@ -20312,7 +20406,7 @@
       </p:sp>
       <p:sp>
         <p:nvSpPr>
-          <p:cNvPr id="176" name="Google Shape;176;p18"/>
+          <p:cNvPr id="177" name="Google Shape;177;p18"/>
           <p:cNvSpPr/>
           <p:nvPr/>
         </p:nvSpPr>
@@ -20363,7 +20457,7 @@
       </p:sp>
       <p:sp>
         <p:nvSpPr>
-          <p:cNvPr id="177" name="Google Shape;177;p18"/>
+          <p:cNvPr id="178" name="Google Shape;178;p18"/>
           <p:cNvSpPr txBox="1"/>
           <p:nvPr/>
         </p:nvSpPr>
@@ -20413,7 +20507,7 @@
       </p:sp>
       <p:sp>
         <p:nvSpPr>
-          <p:cNvPr id="178" name="Google Shape;178;p18"/>
+          <p:cNvPr id="179" name="Google Shape;179;p18"/>
           <p:cNvSpPr txBox="1"/>
           <p:nvPr/>
         </p:nvSpPr>
@@ -20454,7 +20548,7 @@
       </p:sp>
       <p:pic>
         <p:nvPicPr>
-          <p:cNvPr descr="image.png" id="179" name="Google Shape;179;p18"/>
+          <p:cNvPr descr="image.png" id="180" name="Google Shape;180;p18"/>
           <p:cNvPicPr preferRelativeResize="0"/>
           <p:nvPr/>
         </p:nvPicPr>
@@ -20481,7 +20575,7 @@
       </p:pic>
       <p:sp>
         <p:nvSpPr>
-          <p:cNvPr id="180" name="Google Shape;180;p18"/>
+          <p:cNvPr id="181" name="Google Shape;181;p18"/>
           <p:cNvSpPr txBox="1"/>
           <p:nvPr/>
         </p:nvSpPr>
@@ -20553,7 +20647,7 @@
     </p:bg>
     <p:spTree>
       <p:nvGrpSpPr>
-        <p:cNvPr id="184" name="Shape 184"/>
+        <p:cNvPr id="185" name="Shape 185"/>
         <p:cNvGrpSpPr/>
         <p:nvPr/>
       </p:nvGrpSpPr>
@@ -20567,7 +20661,7 @@
       </p:grpSpPr>
       <p:pic>
         <p:nvPicPr>
-          <p:cNvPr descr="image.png" id="185" name="Google Shape;185;p19"/>
+          <p:cNvPr descr="image.png" id="186" name="Google Shape;186;p19"/>
           <p:cNvPicPr preferRelativeResize="0"/>
           <p:nvPr/>
         </p:nvPicPr>
@@ -20594,7 +20688,7 @@
       </p:pic>
       <p:pic>
         <p:nvPicPr>
-          <p:cNvPr descr="image.png" id="186" name="Google Shape;186;p19"/>
+          <p:cNvPr descr="image.png" id="187" name="Google Shape;187;p19"/>
           <p:cNvPicPr preferRelativeResize="0"/>
           <p:nvPr/>
         </p:nvPicPr>
@@ -20621,7 +20715,7 @@
       </p:pic>
       <p:pic>
         <p:nvPicPr>
-          <p:cNvPr descr="image.png" id="187" name="Google Shape;187;p19"/>
+          <p:cNvPr descr="image.png" id="188" name="Google Shape;188;p19"/>
           <p:cNvPicPr preferRelativeResize="0"/>
           <p:nvPr/>
         </p:nvPicPr>
@@ -20648,7 +20742,7 @@
       </p:pic>
       <p:sp>
         <p:nvSpPr>
-          <p:cNvPr id="188" name="Google Shape;188;p19"/>
+          <p:cNvPr id="189" name="Google Shape;189;p19"/>
           <p:cNvSpPr txBox="1"/>
           <p:nvPr/>
         </p:nvSpPr>
@@ -20698,7 +20792,7 @@
       </p:sp>
       <p:sp>
         <p:nvSpPr>
-          <p:cNvPr id="189" name="Google Shape;189;p19"/>
+          <p:cNvPr id="190" name="Google Shape;190;p19"/>
           <p:cNvSpPr/>
           <p:nvPr/>
         </p:nvSpPr>
@@ -20749,7 +20843,7 @@
       </p:sp>
       <p:sp>
         <p:nvSpPr>
-          <p:cNvPr id="190" name="Google Shape;190;p19"/>
+          <p:cNvPr id="191" name="Google Shape;191;p19"/>
           <p:cNvSpPr txBox="1"/>
           <p:nvPr/>
         </p:nvSpPr>
@@ -20835,7 +20929,7 @@
       </p:sp>
       <p:pic>
         <p:nvPicPr>
-          <p:cNvPr id="191" name="Google Shape;191;p19" title="shap_summary_plot.jpg"/>
+          <p:cNvPr id="192" name="Google Shape;192;p19" title="shap_summary_plot.jpg"/>
           <p:cNvPicPr preferRelativeResize="0"/>
           <p:nvPr/>
         </p:nvPicPr>
@@ -20881,7 +20975,7 @@
     </p:bg>
     <p:spTree>
       <p:nvGrpSpPr>
-        <p:cNvPr id="195" name="Shape 195"/>
+        <p:cNvPr id="196" name="Shape 196"/>
         <p:cNvGrpSpPr/>
         <p:nvPr/>
       </p:nvGrpSpPr>
@@ -20895,7 +20989,7 @@
       </p:grpSpPr>
       <p:pic>
         <p:nvPicPr>
-          <p:cNvPr descr="image.png" id="196" name="Google Shape;196;p20"/>
+          <p:cNvPr descr="image.png" id="197" name="Google Shape;197;p20"/>
           <p:cNvPicPr preferRelativeResize="0"/>
           <p:nvPr/>
         </p:nvPicPr>
@@ -20922,7 +21016,7 @@
       </p:pic>
       <p:pic>
         <p:nvPicPr>
-          <p:cNvPr descr="image.png" id="197" name="Google Shape;197;p20"/>
+          <p:cNvPr descr="image.png" id="198" name="Google Shape;198;p20"/>
           <p:cNvPicPr preferRelativeResize="0"/>
           <p:nvPr/>
         </p:nvPicPr>
@@ -20949,7 +21043,7 @@
       </p:pic>
       <p:sp>
         <p:nvSpPr>
-          <p:cNvPr id="198" name="Google Shape;198;p20"/>
+          <p:cNvPr id="199" name="Google Shape;199;p20"/>
           <p:cNvSpPr txBox="1"/>
           <p:nvPr/>
         </p:nvSpPr>
@@ -20999,7 +21093,7 @@
       </p:sp>
       <p:sp>
         <p:nvSpPr>
-          <p:cNvPr id="199" name="Google Shape;199;p20"/>
+          <p:cNvPr id="200" name="Google Shape;200;p20"/>
           <p:cNvSpPr/>
           <p:nvPr/>
         </p:nvSpPr>
@@ -21050,7 +21144,7 @@
       </p:sp>
       <p:sp>
         <p:nvSpPr>
-          <p:cNvPr id="200" name="Google Shape;200;p20"/>
+          <p:cNvPr id="201" name="Google Shape;201;p20"/>
           <p:cNvSpPr/>
           <p:nvPr/>
         </p:nvSpPr>
@@ -21116,7 +21210,7 @@
       </p:sp>
       <p:graphicFrame>
         <p:nvGraphicFramePr>
-          <p:cNvPr id="201" name="Google Shape;201;p20"/>
+          <p:cNvPr id="202" name="Google Shape;202;p20"/>
           <p:cNvGraphicFramePr/>
           <p:nvPr/>
         </p:nvGraphicFramePr>
@@ -21129,7 +21223,7 @@
             <a:tbl>
               <a:tblPr bandRow="1" firstRow="1">
                 <a:noFill/>
-                <a:tableStyleId>{AD8E68D7-74BA-4D39-A1ED-292BA871F60B}</a:tableStyleId>
+                <a:tableStyleId>{C40970EA-49EF-4EA7-A465-39A10629B167}</a:tableStyleId>
               </a:tblPr>
               <a:tblGrid>
                 <a:gridCol w="3344175"/>
@@ -22301,7 +22395,7 @@
       </p:graphicFrame>
       <p:sp>
         <p:nvSpPr>
-          <p:cNvPr id="202" name="Google Shape;202;p20"/>
+          <p:cNvPr id="203" name="Google Shape;203;p20"/>
           <p:cNvSpPr txBox="1"/>
           <p:nvPr/>
         </p:nvSpPr>
@@ -22375,65 +22469,14 @@
       </p:sp>
       <p:sp>
         <p:nvSpPr>
-          <p:cNvPr id="203" name="Google Shape;203;p20"/>
-          <p:cNvSpPr/>
-          <p:nvPr/>
-        </p:nvSpPr>
-        <p:spPr>
-          <a:xfrm>
-            <a:off x="571500" y="2185987"/>
-            <a:ext cx="3344167" cy="9525"/>
-          </a:xfrm>
-          <a:prstGeom prst="rect">
-            <a:avLst/>
-          </a:prstGeom>
-          <a:solidFill>
-            <a:srgbClr val="F1F5F9"/>
-          </a:solidFill>
-          <a:ln>
-            <a:noFill/>
-          </a:ln>
-        </p:spPr>
-        <p:txBody>
-          <a:bodyPr anchorCtr="0" anchor="ctr" bIns="45700" lIns="91425" spcFirstLastPara="1" rIns="91425" wrap="square" tIns="45700">
-            <a:noAutofit/>
-          </a:bodyPr>
-          <a:lstStyle/>
-          <a:p>
-            <a:pPr indent="0" lvl="0" marL="0" marR="0" rtl="0" algn="ctr">
-              <a:spcBef>
-                <a:spcPts val="0"/>
-              </a:spcBef>
-              <a:spcAft>
-                <a:spcPts val="0"/>
-              </a:spcAft>
-              <a:buNone/>
-            </a:pPr>
-            <a:r>
-              <a:t/>
-            </a:r>
-            <a:endParaRPr b="0" i="0" sz="1800" u="none" cap="none" strike="noStrike">
-              <a:solidFill>
-                <a:schemeClr val="dk1"/>
-              </a:solidFill>
-              <a:latin typeface="Calibri"/>
-              <a:ea typeface="Calibri"/>
-              <a:cs typeface="Calibri"/>
-              <a:sym typeface="Calibri"/>
-            </a:endParaRPr>
-          </a:p>
-        </p:txBody>
-      </p:sp>
-      <p:sp>
-        <p:nvSpPr>
           <p:cNvPr id="204" name="Google Shape;204;p20"/>
           <p:cNvSpPr/>
           <p:nvPr/>
         </p:nvSpPr>
         <p:spPr>
           <a:xfrm>
-            <a:off x="3915667" y="2185987"/>
-            <a:ext cx="2956173" cy="9525"/>
+            <a:off x="571500" y="2185987"/>
+            <a:ext cx="3344167" cy="9525"/>
           </a:xfrm>
           <a:prstGeom prst="rect">
             <a:avLst/>
@@ -22483,8 +22526,8 @@
         </p:nvSpPr>
         <p:spPr>
           <a:xfrm>
-            <a:off x="6871841" y="2185987"/>
-            <a:ext cx="4748658" cy="9525"/>
+            <a:off x="3915667" y="2185987"/>
+            <a:ext cx="2956173" cy="9525"/>
           </a:xfrm>
           <a:prstGeom prst="rect">
             <a:avLst/>
@@ -22534,8 +22577,8 @@
         </p:nvSpPr>
         <p:spPr>
           <a:xfrm>
-            <a:off x="571500" y="2681287"/>
-            <a:ext cx="3344167" cy="9525"/>
+            <a:off x="6871841" y="2185987"/>
+            <a:ext cx="4748658" cy="9525"/>
           </a:xfrm>
           <a:prstGeom prst="rect">
             <a:avLst/>
@@ -22585,8 +22628,8 @@
         </p:nvSpPr>
         <p:spPr>
           <a:xfrm>
-            <a:off x="3915667" y="2681287"/>
-            <a:ext cx="2956173" cy="9525"/>
+            <a:off x="571500" y="2681287"/>
+            <a:ext cx="3344167" cy="9525"/>
           </a:xfrm>
           <a:prstGeom prst="rect">
             <a:avLst/>
@@ -22636,8 +22679,8 @@
         </p:nvSpPr>
         <p:spPr>
           <a:xfrm>
-            <a:off x="6871841" y="2681287"/>
-            <a:ext cx="4748658" cy="9525"/>
+            <a:off x="3915667" y="2681287"/>
+            <a:ext cx="2956173" cy="9525"/>
           </a:xfrm>
           <a:prstGeom prst="rect">
             <a:avLst/>
@@ -22687,8 +22730,8 @@
         </p:nvSpPr>
         <p:spPr>
           <a:xfrm>
-            <a:off x="571500" y="3176587"/>
-            <a:ext cx="3344167" cy="9525"/>
+            <a:off x="6871841" y="2681287"/>
+            <a:ext cx="4748658" cy="9525"/>
           </a:xfrm>
           <a:prstGeom prst="rect">
             <a:avLst/>
@@ -22738,8 +22781,8 @@
         </p:nvSpPr>
         <p:spPr>
           <a:xfrm>
-            <a:off x="3915667" y="3176587"/>
-            <a:ext cx="2956173" cy="9525"/>
+            <a:off x="571500" y="3176587"/>
+            <a:ext cx="3344167" cy="9525"/>
           </a:xfrm>
           <a:prstGeom prst="rect">
             <a:avLst/>
@@ -22789,8 +22832,8 @@
         </p:nvSpPr>
         <p:spPr>
           <a:xfrm>
-            <a:off x="6871841" y="3176587"/>
-            <a:ext cx="4748658" cy="9525"/>
+            <a:off x="3915667" y="3176587"/>
+            <a:ext cx="2956173" cy="9525"/>
           </a:xfrm>
           <a:prstGeom prst="rect">
             <a:avLst/>
@@ -22840,8 +22883,8 @@
         </p:nvSpPr>
         <p:spPr>
           <a:xfrm>
-            <a:off x="571500" y="3671887"/>
-            <a:ext cx="3344167" cy="9525"/>
+            <a:off x="6871841" y="3176587"/>
+            <a:ext cx="4748658" cy="9525"/>
           </a:xfrm>
           <a:prstGeom prst="rect">
             <a:avLst/>
@@ -22891,8 +22934,8 @@
         </p:nvSpPr>
         <p:spPr>
           <a:xfrm>
-            <a:off x="3915667" y="3671887"/>
-            <a:ext cx="2956173" cy="9525"/>
+            <a:off x="571500" y="3671887"/>
+            <a:ext cx="3344167" cy="9525"/>
           </a:xfrm>
           <a:prstGeom prst="rect">
             <a:avLst/>
@@ -22937,6 +22980,57 @@
       <p:sp>
         <p:nvSpPr>
           <p:cNvPr id="214" name="Google Shape;214;p20"/>
+          <p:cNvSpPr/>
+          <p:nvPr/>
+        </p:nvSpPr>
+        <p:spPr>
+          <a:xfrm>
+            <a:off x="3915667" y="3671887"/>
+            <a:ext cx="2956173" cy="9525"/>
+          </a:xfrm>
+          <a:prstGeom prst="rect">
+            <a:avLst/>
+          </a:prstGeom>
+          <a:solidFill>
+            <a:srgbClr val="F1F5F9"/>
+          </a:solidFill>
+          <a:ln>
+            <a:noFill/>
+          </a:ln>
+        </p:spPr>
+        <p:txBody>
+          <a:bodyPr anchorCtr="0" anchor="ctr" bIns="45700" lIns="91425" spcFirstLastPara="1" rIns="91425" wrap="square" tIns="45700">
+            <a:noAutofit/>
+          </a:bodyPr>
+          <a:lstStyle/>
+          <a:p>
+            <a:pPr indent="0" lvl="0" marL="0" marR="0" rtl="0" algn="ctr">
+              <a:spcBef>
+                <a:spcPts val="0"/>
+              </a:spcBef>
+              <a:spcAft>
+                <a:spcPts val="0"/>
+              </a:spcAft>
+              <a:buNone/>
+            </a:pPr>
+            <a:r>
+              <a:t/>
+            </a:r>
+            <a:endParaRPr b="0" i="0" sz="1800" u="none" cap="none" strike="noStrike">
+              <a:solidFill>
+                <a:schemeClr val="dk1"/>
+              </a:solidFill>
+              <a:latin typeface="Calibri"/>
+              <a:ea typeface="Calibri"/>
+              <a:cs typeface="Calibri"/>
+              <a:sym typeface="Calibri"/>
+            </a:endParaRPr>
+          </a:p>
+        </p:txBody>
+      </p:sp>
+      <p:sp>
+        <p:nvSpPr>
+          <p:cNvPr id="215" name="Google Shape;215;p20"/>
           <p:cNvSpPr/>
           <p:nvPr/>
         </p:nvSpPr>
@@ -23005,7 +23099,7 @@
     </p:bg>
     <p:spTree>
       <p:nvGrpSpPr>
-        <p:cNvPr id="218" name="Shape 218"/>
+        <p:cNvPr id="219" name="Shape 219"/>
         <p:cNvGrpSpPr/>
         <p:nvPr/>
       </p:nvGrpSpPr>
@@ -23019,7 +23113,7 @@
       </p:grpSpPr>
       <p:pic>
         <p:nvPicPr>
-          <p:cNvPr descr="image.png" id="219" name="Google Shape;219;p21"/>
+          <p:cNvPr descr="image.png" id="220" name="Google Shape;220;p21"/>
           <p:cNvPicPr preferRelativeResize="0"/>
           <p:nvPr/>
         </p:nvPicPr>
@@ -23046,7 +23140,7 @@
       </p:pic>
       <p:pic>
         <p:nvPicPr>
-          <p:cNvPr descr="image.png" id="220" name="Google Shape;220;p21"/>
+          <p:cNvPr descr="image.png" id="221" name="Google Shape;221;p21"/>
           <p:cNvPicPr preferRelativeResize="0"/>
           <p:nvPr/>
         </p:nvPicPr>
@@ -23073,7 +23167,7 @@
       </p:pic>
       <p:pic>
         <p:nvPicPr>
-          <p:cNvPr descr="image.png" id="221" name="Google Shape;221;p21"/>
+          <p:cNvPr descr="image.png" id="222" name="Google Shape;222;p21"/>
           <p:cNvPicPr preferRelativeResize="0"/>
           <p:nvPr/>
         </p:nvPicPr>
@@ -23100,7 +23194,7 @@
       </p:pic>
       <p:sp>
         <p:nvSpPr>
-          <p:cNvPr id="222" name="Google Shape;222;p21"/>
+          <p:cNvPr id="223" name="Google Shape;223;p21"/>
           <p:cNvSpPr txBox="1"/>
           <p:nvPr/>
         </p:nvSpPr>
@@ -23150,7 +23244,7 @@
       </p:sp>
       <p:sp>
         <p:nvSpPr>
-          <p:cNvPr id="223" name="Google Shape;223;p21"/>
+          <p:cNvPr id="224" name="Google Shape;224;p21"/>
           <p:cNvSpPr/>
           <p:nvPr/>
         </p:nvSpPr>
@@ -23201,7 +23295,7 @@
       </p:sp>
       <p:sp>
         <p:nvSpPr>
-          <p:cNvPr id="224" name="Google Shape;224;p21"/>
+          <p:cNvPr id="225" name="Google Shape;225;p21"/>
           <p:cNvSpPr txBox="1"/>
           <p:nvPr/>
         </p:nvSpPr>
@@ -23251,7 +23345,7 @@
       </p:sp>
       <p:pic>
         <p:nvPicPr>
-          <p:cNvPr id="225" name="Google Shape;225;p21"/>
+          <p:cNvPr id="226" name="Google Shape;226;p21"/>
           <p:cNvPicPr preferRelativeResize="0"/>
           <p:nvPr/>
         </p:nvPicPr>
@@ -23286,6 +23380,285 @@
 </file>
 
 <file path=ppt/theme/theme1.xml><?xml version="1.0" encoding="utf-8"?>
+<a:theme xmlns:a="http://schemas.openxmlformats.org/drawingml/2006/main" xmlns:r="http://schemas.openxmlformats.org/officeDocument/2006/relationships" name="Office Theme">
+  <a:themeElements>
+    <a:clrScheme name="Office">
+      <a:dk1>
+        <a:srgbClr val="000000"/>
+      </a:dk1>
+      <a:lt1>
+        <a:srgbClr val="FFFFFF"/>
+      </a:lt1>
+      <a:dk2>
+        <a:srgbClr val="1F497D"/>
+      </a:dk2>
+      <a:lt2>
+        <a:srgbClr val="EEECE1"/>
+      </a:lt2>
+      <a:accent1>
+        <a:srgbClr val="4F81BD"/>
+      </a:accent1>
+      <a:accent2>
+        <a:srgbClr val="C0504D"/>
+      </a:accent2>
+      <a:accent3>
+        <a:srgbClr val="9BBB59"/>
+      </a:accent3>
+      <a:accent4>
+        <a:srgbClr val="8064A2"/>
+      </a:accent4>
+      <a:accent5>
+        <a:srgbClr val="4BACC6"/>
+      </a:accent5>
+      <a:accent6>
+        <a:srgbClr val="F79646"/>
+      </a:accent6>
+      <a:hlink>
+        <a:srgbClr val="0000FF"/>
+      </a:hlink>
+      <a:folHlink>
+        <a:srgbClr val="800080"/>
+      </a:folHlink>
+    </a:clrScheme>
+    <a:fontScheme name="Office">
+      <a:majorFont>
+        <a:latin typeface="Arial"/>
+        <a:ea typeface=""/>
+        <a:cs typeface=""/>
+        <a:font script="Jpan" typeface="ＭＳ Ｐゴシック"/>
+        <a:font script="Hang" typeface="맑은 고딕"/>
+        <a:font script="Hans" typeface="宋体"/>
+        <a:font script="Hant" typeface="新細明體"/>
+        <a:font script="Arab" typeface="Times New Roman"/>
+        <a:font script="Hebr" typeface="Times New Roman"/>
+        <a:font script="Thai" typeface="Angsana New"/>
+        <a:font script="Ethi" typeface="Nyala"/>
+        <a:font script="Beng" typeface="Vrinda"/>
+        <a:font script="Gujr" typeface="Shruti"/>
+        <a:font script="Khmr" typeface="MoolBoran"/>
+        <a:font script="Knda" typeface="Tunga"/>
+        <a:font script="Guru" typeface="Raavi"/>
+        <a:font script="Cans" typeface="Euphemia"/>
+        <a:font script="Cher" typeface="Plantagenet Cherokee"/>
+        <a:font script="Yiii" typeface="Microsoft Yi Baiti"/>
+        <a:font script="Tibt" typeface="Microsoft Himalaya"/>
+        <a:font script="Thaa" typeface="MV Boli"/>
+        <a:font script="Deva" typeface="Mangal"/>
+        <a:font script="Telu" typeface="Gautami"/>
+        <a:font script="Taml" typeface="Latha"/>
+        <a:font script="Syrc" typeface="Estrangelo Edessa"/>
+        <a:font script="Orya" typeface="Kalinga"/>
+        <a:font script="Mlym" typeface="Kartika"/>
+        <a:font script="Laoo" typeface="DokChampa"/>
+        <a:font script="Sinh" typeface="Iskoola Pota"/>
+        <a:font script="Mong" typeface="Mongolian Baiti"/>
+        <a:font script="Viet" typeface="Times New Roman"/>
+        <a:font script="Uigh" typeface="Microsoft Uighur"/>
+        <a:font script="Geor" typeface="Sylfaen"/>
+      </a:majorFont>
+      <a:minorFont>
+        <a:latin typeface="Arial"/>
+        <a:ea typeface=""/>
+        <a:cs typeface=""/>
+        <a:font script="Jpan" typeface="ＭＳ Ｐゴシック"/>
+        <a:font script="Hang" typeface="맑은 고딕"/>
+        <a:font script="Hans" typeface="宋体"/>
+        <a:font script="Hant" typeface="新細明體"/>
+        <a:font script="Arab" typeface="Arial"/>
+        <a:font script="Hebr" typeface="Arial"/>
+        <a:font script="Thai" typeface="Cordia New"/>
+        <a:font script="Ethi" typeface="Nyala"/>
+        <a:font script="Beng" typeface="Vrinda"/>
+        <a:font script="Gujr" typeface="Shruti"/>
+        <a:font script="Khmr" typeface="DaunPenh"/>
+        <a:font script="Knda" typeface="Tunga"/>
+        <a:font script="Guru" typeface="Raavi"/>
+        <a:font script="Cans" typeface="Euphemia"/>
+        <a:font script="Cher" typeface="Plantagenet Cherokee"/>
+        <a:font script="Yiii" typeface="Microsoft Yi Baiti"/>
+        <a:font script="Tibt" typeface="Microsoft Himalaya"/>
+        <a:font script="Thaa" typeface="MV Boli"/>
+        <a:font script="Deva" typeface="Mangal"/>
+        <a:font script="Telu" typeface="Gautami"/>
+        <a:font script="Taml" typeface="Latha"/>
+        <a:font script="Syrc" typeface="Estrangelo Edessa"/>
+        <a:font script="Orya" typeface="Kalinga"/>
+        <a:font script="Mlym" typeface="Kartika"/>
+        <a:font script="Laoo" typeface="DokChampa"/>
+        <a:font script="Sinh" typeface="Iskoola Pota"/>
+        <a:font script="Mong" typeface="Mongolian Baiti"/>
+        <a:font script="Viet" typeface="Arial"/>
+        <a:font script="Uigh" typeface="Microsoft Uighur"/>
+        <a:font script="Geor" typeface="Sylfaen"/>
+      </a:minorFont>
+    </a:fontScheme>
+    <a:fmtScheme name="Office">
+      <a:fillStyleLst>
+        <a:solidFill>
+          <a:schemeClr val="phClr"/>
+        </a:solidFill>
+        <a:gradFill rotWithShape="1">
+          <a:gsLst>
+            <a:gs pos="0">
+              <a:schemeClr val="phClr">
+                <a:tint val="50000"/>
+                <a:satMod val="300000"/>
+              </a:schemeClr>
+            </a:gs>
+            <a:gs pos="35000">
+              <a:schemeClr val="phClr">
+                <a:tint val="37000"/>
+                <a:satMod val="300000"/>
+              </a:schemeClr>
+            </a:gs>
+            <a:gs pos="100000">
+              <a:schemeClr val="phClr">
+                <a:tint val="15000"/>
+                <a:satMod val="350000"/>
+              </a:schemeClr>
+            </a:gs>
+          </a:gsLst>
+          <a:lin ang="16200000" scaled="1"/>
+        </a:gradFill>
+        <a:gradFill rotWithShape="1">
+          <a:gsLst>
+            <a:gs pos="0">
+              <a:schemeClr val="phClr">
+                <a:tint val="100000"/>
+                <a:shade val="100000"/>
+                <a:satMod val="130000"/>
+              </a:schemeClr>
+            </a:gs>
+            <a:gs pos="100000">
+              <a:schemeClr val="phClr">
+                <a:tint val="50000"/>
+                <a:shade val="100000"/>
+                <a:satMod val="350000"/>
+              </a:schemeClr>
+            </a:gs>
+          </a:gsLst>
+          <a:lin ang="16200000" scaled="0"/>
+        </a:gradFill>
+      </a:fillStyleLst>
+      <a:lnStyleLst>
+        <a:ln w="9525" cap="flat" cmpd="sng" algn="ctr">
+          <a:solidFill>
+            <a:schemeClr val="phClr">
+              <a:shade val="95000"/>
+              <a:satMod val="105000"/>
+            </a:schemeClr>
+          </a:solidFill>
+          <a:prstDash val="solid"/>
+        </a:ln>
+        <a:ln w="25400" cap="flat" cmpd="sng" algn="ctr">
+          <a:solidFill>
+            <a:schemeClr val="phClr"/>
+          </a:solidFill>
+          <a:prstDash val="solid"/>
+        </a:ln>
+        <a:ln w="38100" cap="flat" cmpd="sng" algn="ctr">
+          <a:solidFill>
+            <a:schemeClr val="phClr"/>
+          </a:solidFill>
+          <a:prstDash val="solid"/>
+        </a:ln>
+      </a:lnStyleLst>
+      <a:effectStyleLst>
+        <a:effectStyle>
+          <a:effectLst>
+            <a:outerShdw blurRad="40000" dist="20000" dir="5400000" rotWithShape="0">
+              <a:srgbClr val="000000">
+                <a:alpha val="38000"/>
+              </a:srgbClr>
+            </a:outerShdw>
+          </a:effectLst>
+        </a:effectStyle>
+        <a:effectStyle>
+          <a:effectLst>
+            <a:outerShdw blurRad="40000" dist="23000" dir="5400000" rotWithShape="0">
+              <a:srgbClr val="000000">
+                <a:alpha val="35000"/>
+              </a:srgbClr>
+            </a:outerShdw>
+          </a:effectLst>
+        </a:effectStyle>
+        <a:effectStyle>
+          <a:effectLst>
+            <a:outerShdw blurRad="40000" dist="23000" dir="5400000" rotWithShape="0">
+              <a:srgbClr val="000000">
+                <a:alpha val="35000"/>
+              </a:srgbClr>
+            </a:outerShdw>
+          </a:effectLst>
+          <a:scene3d>
+            <a:camera prst="orthographicFront">
+              <a:rot lat="0" lon="0" rev="0"/>
+            </a:camera>
+            <a:lightRig rig="threePt" dir="t">
+              <a:rot lat="0" lon="0" rev="1200000"/>
+            </a:lightRig>
+          </a:scene3d>
+          <a:sp3d>
+            <a:bevelT w="63500" h="25400"/>
+          </a:sp3d>
+        </a:effectStyle>
+      </a:effectStyleLst>
+      <a:bgFillStyleLst>
+        <a:solidFill>
+          <a:schemeClr val="phClr"/>
+        </a:solidFill>
+        <a:gradFill rotWithShape="1">
+          <a:gsLst>
+            <a:gs pos="0">
+              <a:schemeClr val="phClr">
+                <a:tint val="40000"/>
+                <a:satMod val="350000"/>
+              </a:schemeClr>
+            </a:gs>
+            <a:gs pos="40000">
+              <a:schemeClr val="phClr">
+                <a:tint val="45000"/>
+                <a:shade val="99000"/>
+                <a:satMod val="350000"/>
+              </a:schemeClr>
+            </a:gs>
+            <a:gs pos="100000">
+              <a:schemeClr val="phClr">
+                <a:shade val="20000"/>
+                <a:satMod val="255000"/>
+              </a:schemeClr>
+            </a:gs>
+          </a:gsLst>
+          <a:path path="circle">
+            <a:fillToRect l="50000" t="-80000" r="50000" b="180000"/>
+          </a:path>
+        </a:gradFill>
+        <a:gradFill rotWithShape="1">
+          <a:gsLst>
+            <a:gs pos="0">
+              <a:schemeClr val="phClr">
+                <a:tint val="80000"/>
+                <a:satMod val="300000"/>
+              </a:schemeClr>
+            </a:gs>
+            <a:gs pos="100000">
+              <a:schemeClr val="phClr">
+                <a:shade val="30000"/>
+                <a:satMod val="200000"/>
+              </a:schemeClr>
+            </a:gs>
+          </a:gsLst>
+          <a:path path="circle">
+            <a:fillToRect l="50000" t="50000" r="50000" b="50000"/>
+          </a:path>
+        </a:gradFill>
+      </a:bgFillStyleLst>
+    </a:fmtScheme>
+  </a:themeElements>
+</a:theme>
+</file>
+
+<file path=ppt/theme/theme2.xml><?xml version="1.0" encoding="utf-8"?>
 <a:theme xmlns:a="http://schemas.openxmlformats.org/drawingml/2006/main" xmlns:r="http://schemas.openxmlformats.org/officeDocument/2006/relationships">
   <a:themeElements>
     <a:clrScheme name="Default">
@@ -23562,283 +23935,4 @@
     </a:fmtScheme>
   </a:themeElements>
 </a:theme>
-</file>
-
-<file path=ppt/theme/theme2.xml><?xml version="1.0" encoding="utf-8"?>
-<a:theme xmlns:a="http://schemas.openxmlformats.org/drawingml/2006/main" xmlns:r="http://schemas.openxmlformats.org/officeDocument/2006/relationships" name="Office Theme">
-  <a:themeElements>
-    <a:clrScheme name="Office">
-      <a:dk1>
-        <a:srgbClr val="000000"/>
-      </a:dk1>
-      <a:lt1>
-        <a:srgbClr val="FFFFFF"/>
-      </a:lt1>
-      <a:dk2>
-        <a:srgbClr val="1F497D"/>
-      </a:dk2>
-      <a:lt2>
-        <a:srgbClr val="EEECE1"/>
-      </a:lt2>
-      <a:accent1>
-        <a:srgbClr val="4F81BD"/>
-      </a:accent1>
-      <a:accent2>
-        <a:srgbClr val="C0504D"/>
-      </a:accent2>
-      <a:accent3>
-        <a:srgbClr val="9BBB59"/>
-      </a:accent3>
-      <a:accent4>
-        <a:srgbClr val="8064A2"/>
-      </a:accent4>
-      <a:accent5>
-        <a:srgbClr val="4BACC6"/>
-      </a:accent5>
-      <a:accent6>
-        <a:srgbClr val="F79646"/>
-      </a:accent6>
-      <a:hlink>
-        <a:srgbClr val="0000FF"/>
-      </a:hlink>
-      <a:folHlink>
-        <a:srgbClr val="800080"/>
-      </a:folHlink>
-    </a:clrScheme>
-    <a:fontScheme name="Office">
-      <a:majorFont>
-        <a:latin typeface="Arial"/>
-        <a:ea typeface=""/>
-        <a:cs typeface=""/>
-        <a:font script="Jpan" typeface="ＭＳ Ｐゴシック"/>
-        <a:font script="Hang" typeface="맑은 고딕"/>
-        <a:font script="Hans" typeface="宋体"/>
-        <a:font script="Hant" typeface="新細明體"/>
-        <a:font script="Arab" typeface="Times New Roman"/>
-        <a:font script="Hebr" typeface="Times New Roman"/>
-        <a:font script="Thai" typeface="Angsana New"/>
-        <a:font script="Ethi" typeface="Nyala"/>
-        <a:font script="Beng" typeface="Vrinda"/>
-        <a:font script="Gujr" typeface="Shruti"/>
-        <a:font script="Khmr" typeface="MoolBoran"/>
-        <a:font script="Knda" typeface="Tunga"/>
-        <a:font script="Guru" typeface="Raavi"/>
-        <a:font script="Cans" typeface="Euphemia"/>
-        <a:font script="Cher" typeface="Plantagenet Cherokee"/>
-        <a:font script="Yiii" typeface="Microsoft Yi Baiti"/>
-        <a:font script="Tibt" typeface="Microsoft Himalaya"/>
-        <a:font script="Thaa" typeface="MV Boli"/>
-        <a:font script="Deva" typeface="Mangal"/>
-        <a:font script="Telu" typeface="Gautami"/>
-        <a:font script="Taml" typeface="Latha"/>
-        <a:font script="Syrc" typeface="Estrangelo Edessa"/>
-        <a:font script="Orya" typeface="Kalinga"/>
-        <a:font script="Mlym" typeface="Kartika"/>
-        <a:font script="Laoo" typeface="DokChampa"/>
-        <a:font script="Sinh" typeface="Iskoola Pota"/>
-        <a:font script="Mong" typeface="Mongolian Baiti"/>
-        <a:font script="Viet" typeface="Times New Roman"/>
-        <a:font script="Uigh" typeface="Microsoft Uighur"/>
-        <a:font script="Geor" typeface="Sylfaen"/>
-      </a:majorFont>
-      <a:minorFont>
-        <a:latin typeface="Arial"/>
-        <a:ea typeface=""/>
-        <a:cs typeface=""/>
-        <a:font script="Jpan" typeface="ＭＳ Ｐゴシック"/>
-        <a:font script="Hang" typeface="맑은 고딕"/>
-        <a:font script="Hans" typeface="宋体"/>
-        <a:font script="Hant" typeface="新細明體"/>
-        <a:font script="Arab" typeface="Arial"/>
-        <a:font script="Hebr" typeface="Arial"/>
-        <a:font script="Thai" typeface="Cordia New"/>
-        <a:font script="Ethi" typeface="Nyala"/>
-        <a:font script="Beng" typeface="Vrinda"/>
-        <a:font script="Gujr" typeface="Shruti"/>
-        <a:font script="Khmr" typeface="DaunPenh"/>
-        <a:font script="Knda" typeface="Tunga"/>
-        <a:font script="Guru" typeface="Raavi"/>
-        <a:font script="Cans" typeface="Euphemia"/>
-        <a:font script="Cher" typeface="Plantagenet Cherokee"/>
-        <a:font script="Yiii" typeface="Microsoft Yi Baiti"/>
-        <a:font script="Tibt" typeface="Microsoft Himalaya"/>
-        <a:font script="Thaa" typeface="MV Boli"/>
-        <a:font script="Deva" typeface="Mangal"/>
-        <a:font script="Telu" typeface="Gautami"/>
-        <a:font script="Taml" typeface="Latha"/>
-        <a:font script="Syrc" typeface="Estrangelo Edessa"/>
-        <a:font script="Orya" typeface="Kalinga"/>
-        <a:font script="Mlym" typeface="Kartika"/>
-        <a:font script="Laoo" typeface="DokChampa"/>
-        <a:font script="Sinh" typeface="Iskoola Pota"/>
-        <a:font script="Mong" typeface="Mongolian Baiti"/>
-        <a:font script="Viet" typeface="Arial"/>
-        <a:font script="Uigh" typeface="Microsoft Uighur"/>
-        <a:font script="Geor" typeface="Sylfaen"/>
-      </a:minorFont>
-    </a:fontScheme>
-    <a:fmtScheme name="Office">
-      <a:fillStyleLst>
-        <a:solidFill>
-          <a:schemeClr val="phClr"/>
-        </a:solidFill>
-        <a:gradFill rotWithShape="1">
-          <a:gsLst>
-            <a:gs pos="0">
-              <a:schemeClr val="phClr">
-                <a:tint val="50000"/>
-                <a:satMod val="300000"/>
-              </a:schemeClr>
-            </a:gs>
-            <a:gs pos="35000">
-              <a:schemeClr val="phClr">
-                <a:tint val="37000"/>
-                <a:satMod val="300000"/>
-              </a:schemeClr>
-            </a:gs>
-            <a:gs pos="100000">
-              <a:schemeClr val="phClr">
-                <a:tint val="15000"/>
-                <a:satMod val="350000"/>
-              </a:schemeClr>
-            </a:gs>
-          </a:gsLst>
-          <a:lin ang="16200000" scaled="1"/>
-        </a:gradFill>
-        <a:gradFill rotWithShape="1">
-          <a:gsLst>
-            <a:gs pos="0">
-              <a:schemeClr val="phClr">
-                <a:tint val="100000"/>
-                <a:shade val="100000"/>
-                <a:satMod val="130000"/>
-              </a:schemeClr>
-            </a:gs>
-            <a:gs pos="100000">
-              <a:schemeClr val="phClr">
-                <a:tint val="50000"/>
-                <a:shade val="100000"/>
-                <a:satMod val="350000"/>
-              </a:schemeClr>
-            </a:gs>
-          </a:gsLst>
-          <a:lin ang="16200000" scaled="0"/>
-        </a:gradFill>
-      </a:fillStyleLst>
-      <a:lnStyleLst>
-        <a:ln w="9525" cap="flat" cmpd="sng" algn="ctr">
-          <a:solidFill>
-            <a:schemeClr val="phClr">
-              <a:shade val="95000"/>
-              <a:satMod val="105000"/>
-            </a:schemeClr>
-          </a:solidFill>
-          <a:prstDash val="solid"/>
-        </a:ln>
-        <a:ln w="25400" cap="flat" cmpd="sng" algn="ctr">
-          <a:solidFill>
-            <a:schemeClr val="phClr"/>
-          </a:solidFill>
-          <a:prstDash val="solid"/>
-        </a:ln>
-        <a:ln w="38100" cap="flat" cmpd="sng" algn="ctr">
-          <a:solidFill>
-            <a:schemeClr val="phClr"/>
-          </a:solidFill>
-          <a:prstDash val="solid"/>
-        </a:ln>
-      </a:lnStyleLst>
-      <a:effectStyleLst>
-        <a:effectStyle>
-          <a:effectLst>
-            <a:outerShdw blurRad="40000" dist="20000" dir="5400000" rotWithShape="0">
-              <a:srgbClr val="000000">
-                <a:alpha val="38000"/>
-              </a:srgbClr>
-            </a:outerShdw>
-          </a:effectLst>
-        </a:effectStyle>
-        <a:effectStyle>
-          <a:effectLst>
-            <a:outerShdw blurRad="40000" dist="23000" dir="5400000" rotWithShape="0">
-              <a:srgbClr val="000000">
-                <a:alpha val="35000"/>
-              </a:srgbClr>
-            </a:outerShdw>
-          </a:effectLst>
-        </a:effectStyle>
-        <a:effectStyle>
-          <a:effectLst>
-            <a:outerShdw blurRad="40000" dist="23000" dir="5400000" rotWithShape="0">
-              <a:srgbClr val="000000">
-                <a:alpha val="35000"/>
-              </a:srgbClr>
-            </a:outerShdw>
-          </a:effectLst>
-          <a:scene3d>
-            <a:camera prst="orthographicFront">
-              <a:rot lat="0" lon="0" rev="0"/>
-            </a:camera>
-            <a:lightRig rig="threePt" dir="t">
-              <a:rot lat="0" lon="0" rev="1200000"/>
-            </a:lightRig>
-          </a:scene3d>
-          <a:sp3d>
-            <a:bevelT w="63500" h="25400"/>
-          </a:sp3d>
-        </a:effectStyle>
-      </a:effectStyleLst>
-      <a:bgFillStyleLst>
-        <a:solidFill>
-          <a:schemeClr val="phClr"/>
-        </a:solidFill>
-        <a:gradFill rotWithShape="1">
-          <a:gsLst>
-            <a:gs pos="0">
-              <a:schemeClr val="phClr">
-                <a:tint val="40000"/>
-                <a:satMod val="350000"/>
-              </a:schemeClr>
-            </a:gs>
-            <a:gs pos="40000">
-              <a:schemeClr val="phClr">
-                <a:tint val="45000"/>
-                <a:shade val="99000"/>
-                <a:satMod val="350000"/>
-              </a:schemeClr>
-            </a:gs>
-            <a:gs pos="100000">
-              <a:schemeClr val="phClr">
-                <a:shade val="20000"/>
-                <a:satMod val="255000"/>
-              </a:schemeClr>
-            </a:gs>
-          </a:gsLst>
-          <a:path path="circle">
-            <a:fillToRect l="50000" t="-80000" r="50000" b="180000"/>
-          </a:path>
-        </a:gradFill>
-        <a:gradFill rotWithShape="1">
-          <a:gsLst>
-            <a:gs pos="0">
-              <a:schemeClr val="phClr">
-                <a:tint val="80000"/>
-                <a:satMod val="300000"/>
-              </a:schemeClr>
-            </a:gs>
-            <a:gs pos="100000">
-              <a:schemeClr val="phClr">
-                <a:shade val="30000"/>
-                <a:satMod val="200000"/>
-              </a:schemeClr>
-            </a:gs>
-          </a:gsLst>
-          <a:path path="circle">
-            <a:fillToRect l="50000" t="50000" r="50000" b="50000"/>
-          </a:path>
-        </a:gradFill>
-      </a:bgFillStyleLst>
-    </a:fmtScheme>
-  </a:themeElements>
-</a:theme>
 </file>